--- a/app/templates/universidad_2qrs/plantilla_programa_de_especializacion.pptx
+++ b/app/templates/universidad_2qrs/plantilla_programa_de_especializacion.pptx
@@ -119,112 +119,116 @@
 </p:presentation>
 </file>
 
+<file path=ppt/revisionInfo.xml><?xml version="1.0" encoding="utf-8"?>
+<p1510:revInfo xmlns:a="http://schemas.openxmlformats.org/drawingml/2006/main" xmlns:r="http://schemas.openxmlformats.org/officeDocument/2006/relationships" xmlns:p1510="http://schemas.microsoft.com/office/powerpoint/2015/10/main">
+  <p1510:revLst>
+    <p1510:client id="{833E3ECE-2174-407D-B644-D0DBC5905E7E}" v="9" dt="2026-03-05T19:00:39.869"/>
+  </p1510:revLst>
+</p1510:revInfo>
+</file>
+
 <file path=ppt/changesInfos/changesInfo1.xml><?xml version="1.0" encoding="utf-8"?>
 <pc:chgInfo xmlns:a="http://schemas.openxmlformats.org/drawingml/2006/main" xmlns:r="http://schemas.openxmlformats.org/officeDocument/2006/relationships" xmlns:ac="http://schemas.microsoft.com/office/drawing/2013/main/command" xmlns:pc="http://schemas.microsoft.com/office/powerpoint/2013/main/command">
   <pc:docChgLst>
     <pc:chgData name="Benjamín de Jesús Cueva Niño de Guzmán" userId="56da303013910523" providerId="LiveId" clId="{532B7A48-8887-4F62-9537-0BA1FAE83637}"/>
     <pc:docChg chg="custSel delSld modSld">
-      <pc:chgData name="Benjamín de Jesús Cueva Niño de Guzmán" userId="56da303013910523" providerId="LiveId" clId="{532B7A48-8887-4F62-9537-0BA1FAE83637}" dt="2026-01-14T23:39:32.441" v="15" actId="6549"/>
+      <pc:chgData name="Benjamín de Jesús Cueva Niño de Guzmán" userId="56da303013910523" providerId="LiveId" clId="{532B7A48-8887-4F62-9537-0BA1FAE83637}" dt="2026-03-05T19:00:39.869" v="115"/>
       <pc:docMkLst>
         <pc:docMk/>
       </pc:docMkLst>
-      <pc:sldChg chg="delSp modSp mod">
-        <pc:chgData name="Benjamín de Jesús Cueva Niño de Guzmán" userId="56da303013910523" providerId="LiveId" clId="{532B7A48-8887-4F62-9537-0BA1FAE83637}" dt="2026-01-14T23:39:12.411" v="12" actId="1036"/>
+      <pc:sldChg chg="addSp delSp modSp mod">
+        <pc:chgData name="Benjamín de Jesús Cueva Niño de Guzmán" userId="56da303013910523" providerId="LiveId" clId="{532B7A48-8887-4F62-9537-0BA1FAE83637}" dt="2026-03-05T18:27:55.616" v="111" actId="1035"/>
         <pc:sldMkLst>
           <pc:docMk/>
           <pc:sldMk cId="2410626708" sldId="277"/>
         </pc:sldMkLst>
         <pc:spChg chg="mod">
-          <ac:chgData name="Benjamín de Jesús Cueva Niño de Guzmán" userId="56da303013910523" providerId="LiveId" clId="{532B7A48-8887-4F62-9537-0BA1FAE83637}" dt="2026-01-14T23:39:12.411" v="12" actId="1036"/>
+          <ac:chgData name="Benjamín de Jesús Cueva Niño de Guzmán" userId="56da303013910523" providerId="LiveId" clId="{532B7A48-8887-4F62-9537-0BA1FAE83637}" dt="2026-03-03T01:55:37.942" v="105" actId="1035"/>
+          <ac:spMkLst>
+            <pc:docMk/>
+            <pc:sldMk cId="2410626708" sldId="277"/>
+            <ac:spMk id="2" creationId="{6718E74D-9F2C-B892-E699-1EC198F4A308}"/>
+          </ac:spMkLst>
+        </pc:spChg>
+        <pc:spChg chg="mod ord topLvl">
+          <ac:chgData name="Benjamín de Jesús Cueva Niño de Guzmán" userId="56da303013910523" providerId="LiveId" clId="{532B7A48-8887-4F62-9537-0BA1FAE83637}" dt="2026-03-05T18:27:55.616" v="111" actId="1035"/>
+          <ac:spMkLst>
+            <pc:docMk/>
+            <pc:sldMk cId="2410626708" sldId="277"/>
+            <ac:spMk id="19" creationId="{991C4A27-894B-7257-8062-6F839343BAAD}"/>
+          </ac:spMkLst>
+        </pc:spChg>
+        <pc:spChg chg="ord">
+          <ac:chgData name="Benjamín de Jesús Cueva Niño de Guzmán" userId="56da303013910523" providerId="LiveId" clId="{532B7A48-8887-4F62-9537-0BA1FAE83637}" dt="2026-03-03T01:54:43.916" v="100" actId="167"/>
           <ac:spMkLst>
             <pc:docMk/>
             <pc:sldMk cId="2410626708" sldId="277"/>
             <ac:spMk id="22" creationId="{D6CB106F-7EC0-002A-CEBE-0064B169D038}"/>
           </ac:spMkLst>
         </pc:spChg>
-        <pc:spChg chg="mod">
-          <ac:chgData name="Benjamín de Jesús Cueva Niño de Guzmán" userId="56da303013910523" providerId="LiveId" clId="{532B7A48-8887-4F62-9537-0BA1FAE83637}" dt="2026-01-14T23:39:12.411" v="12" actId="1036"/>
+        <pc:spChg chg="ord">
+          <ac:chgData name="Benjamín de Jesús Cueva Niño de Guzmán" userId="56da303013910523" providerId="LiveId" clId="{532B7A48-8887-4F62-9537-0BA1FAE83637}" dt="2026-03-03T01:54:43.916" v="100" actId="167"/>
           <ac:spMkLst>
             <pc:docMk/>
             <pc:sldMk cId="2410626708" sldId="277"/>
             <ac:spMk id="23" creationId="{D962536F-CB9F-1938-8F28-5D8C8FE943C7}"/>
           </ac:spMkLst>
         </pc:spChg>
-        <pc:picChg chg="del">
-          <ac:chgData name="Benjamín de Jesús Cueva Niño de Guzmán" userId="56da303013910523" providerId="LiveId" clId="{532B7A48-8887-4F62-9537-0BA1FAE83637}" dt="2026-01-14T23:39:07" v="4" actId="478"/>
+        <pc:picChg chg="ord">
+          <ac:chgData name="Benjamín de Jesús Cueva Niño de Guzmán" userId="56da303013910523" providerId="LiveId" clId="{532B7A48-8887-4F62-9537-0BA1FAE83637}" dt="2026-03-03T01:54:31.910" v="99" actId="167"/>
           <ac:picMkLst>
             <pc:docMk/>
             <pc:sldMk cId="2410626708" sldId="277"/>
-            <ac:picMk id="18" creationId="{65D7DBE5-F3CD-0E62-8756-B223F377361E}"/>
+            <ac:picMk id="8" creationId="{9F25441A-93BD-74CB-56AE-2B019756F5A7}"/>
           </ac:picMkLst>
         </pc:picChg>
       </pc:sldChg>
-      <pc:sldChg chg="delSp modSp mod">
-        <pc:chgData name="Benjamín de Jesús Cueva Niño de Guzmán" userId="56da303013910523" providerId="LiveId" clId="{532B7A48-8887-4F62-9537-0BA1FAE83637}" dt="2026-01-14T23:39:32.441" v="15" actId="6549"/>
+      <pc:sldChg chg="addSp delSp modSp mod">
+        <pc:chgData name="Benjamín de Jesús Cueva Niño de Guzmán" userId="56da303013910523" providerId="LiveId" clId="{532B7A48-8887-4F62-9537-0BA1FAE83637}" dt="2026-03-05T19:00:39.869" v="115"/>
         <pc:sldMkLst>
           <pc:docMk/>
           <pc:sldMk cId="4084903007" sldId="278"/>
         </pc:sldMkLst>
+        <pc:spChg chg="add mod">
+          <ac:chgData name="Benjamín de Jesús Cueva Niño de Guzmán" userId="56da303013910523" providerId="LiveId" clId="{532B7A48-8887-4F62-9537-0BA1FAE83637}" dt="2026-03-05T19:00:33.388" v="114"/>
+          <ac:spMkLst>
+            <pc:docMk/>
+            <pc:sldMk cId="4084903007" sldId="278"/>
+            <ac:spMk id="8" creationId="{1BD7C6F0-73B6-617B-0B21-594BAED95EBF}"/>
+          </ac:spMkLst>
+        </pc:spChg>
+        <pc:spChg chg="add mod">
+          <ac:chgData name="Benjamín de Jesús Cueva Niño de Guzmán" userId="56da303013910523" providerId="LiveId" clId="{532B7A48-8887-4F62-9537-0BA1FAE83637}" dt="2026-03-05T19:00:39.869" v="115"/>
+          <ac:spMkLst>
+            <pc:docMk/>
+            <pc:sldMk cId="4084903007" sldId="278"/>
+            <ac:spMk id="9" creationId="{C20AC980-C716-2F9A-06C1-9B86085426E8}"/>
+          </ac:spMkLst>
+        </pc:spChg>
         <pc:spChg chg="mod">
-          <ac:chgData name="Benjamín de Jesús Cueva Niño de Guzmán" userId="56da303013910523" providerId="LiveId" clId="{532B7A48-8887-4F62-9537-0BA1FAE83637}" dt="2026-01-14T23:39:32.441" v="15" actId="6549"/>
+          <ac:chgData name="Benjamín de Jesús Cueva Niño de Guzmán" userId="56da303013910523" providerId="LiveId" clId="{532B7A48-8887-4F62-9537-0BA1FAE83637}" dt="2026-03-02T03:09:00.477" v="74" actId="962"/>
+          <ac:spMkLst>
+            <pc:docMk/>
+            <pc:sldMk cId="4084903007" sldId="278"/>
+            <ac:spMk id="11" creationId="{6A9C3E86-51AE-E415-AE46-871F1395CD67}"/>
+          </ac:spMkLst>
+        </pc:spChg>
+        <pc:spChg chg="del">
+          <ac:chgData name="Benjamín de Jesús Cueva Niño de Guzmán" userId="56da303013910523" providerId="LiveId" clId="{532B7A48-8887-4F62-9537-0BA1FAE83637}" dt="2026-03-05T19:00:32.292" v="112" actId="478"/>
           <ac:spMkLst>
             <pc:docMk/>
             <pc:sldMk cId="4084903007" sldId="278"/>
             <ac:spMk id="25" creationId="{1BD7C6F0-73B6-617B-0B21-594BAED95EBF}"/>
           </ac:spMkLst>
         </pc:spChg>
-        <pc:picChg chg="del">
-          <ac:chgData name="Benjamín de Jesús Cueva Niño de Guzmán" userId="56da303013910523" providerId="LiveId" clId="{532B7A48-8887-4F62-9537-0BA1FAE83637}" dt="2026-01-14T23:39:27.620" v="13" actId="478"/>
-          <ac:picMkLst>
+        <pc:graphicFrameChg chg="mod modGraphic">
+          <ac:chgData name="Benjamín de Jesús Cueva Niño de Guzmán" userId="56da303013910523" providerId="LiveId" clId="{532B7A48-8887-4F62-9537-0BA1FAE83637}" dt="2026-03-02T03:09:18.900" v="91" actId="12788"/>
+          <ac:graphicFrameMkLst>
             <pc:docMk/>
             <pc:sldMk cId="4084903007" sldId="278"/>
-            <ac:picMk id="7" creationId="{1A5F3F7F-F6EA-295F-A298-EE7118A8FF90}"/>
-          </ac:picMkLst>
-        </pc:picChg>
-        <pc:picChg chg="del">
-          <ac:chgData name="Benjamín de Jesús Cueva Niño de Guzmán" userId="56da303013910523" providerId="LiveId" clId="{532B7A48-8887-4F62-9537-0BA1FAE83637}" dt="2026-01-14T23:39:29.163" v="14" actId="478"/>
-          <ac:picMkLst>
-            <pc:docMk/>
-            <pc:sldMk cId="4084903007" sldId="278"/>
-            <ac:picMk id="17" creationId="{E2F7B553-0DD8-3254-E8A5-8AFCBCCE12B1}"/>
-          </ac:picMkLst>
-        </pc:picChg>
-        <pc:picChg chg="del">
-          <ac:chgData name="Benjamín de Jesús Cueva Niño de Guzmán" userId="56da303013910523" providerId="LiveId" clId="{532B7A48-8887-4F62-9537-0BA1FAE83637}" dt="2026-01-14T23:39:08.807" v="5" actId="478"/>
-          <ac:picMkLst>
-            <pc:docMk/>
-            <pc:sldMk cId="4084903007" sldId="278"/>
-            <ac:picMk id="26" creationId="{39C9745C-4A41-3AC5-CAAD-095724A20EBB}"/>
-          </ac:picMkLst>
-        </pc:picChg>
-      </pc:sldChg>
-      <pc:sldChg chg="del">
-        <pc:chgData name="Benjamín de Jesús Cueva Niño de Guzmán" userId="56da303013910523" providerId="LiveId" clId="{532B7A48-8887-4F62-9537-0BA1FAE83637}" dt="2026-01-14T23:38:56.402" v="2" actId="47"/>
-        <pc:sldMkLst>
-          <pc:docMk/>
-          <pc:sldMk cId="1379650257" sldId="279"/>
-        </pc:sldMkLst>
-      </pc:sldChg>
-      <pc:sldChg chg="del">
-        <pc:chgData name="Benjamín de Jesús Cueva Niño de Guzmán" userId="56da303013910523" providerId="LiveId" clId="{532B7A48-8887-4F62-9537-0BA1FAE83637}" dt="2026-01-14T23:38:56.766" v="3" actId="47"/>
-        <pc:sldMkLst>
-          <pc:docMk/>
-          <pc:sldMk cId="2353653050" sldId="280"/>
-        </pc:sldMkLst>
-      </pc:sldChg>
-      <pc:sldChg chg="del">
-        <pc:chgData name="Benjamín de Jesús Cueva Niño de Guzmán" userId="56da303013910523" providerId="LiveId" clId="{532B7A48-8887-4F62-9537-0BA1FAE83637}" dt="2026-01-14T23:38:55.858" v="0" actId="47"/>
-        <pc:sldMkLst>
-          <pc:docMk/>
-          <pc:sldMk cId="4178494260" sldId="281"/>
-        </pc:sldMkLst>
-      </pc:sldChg>
-      <pc:sldChg chg="del">
-        <pc:chgData name="Benjamín de Jesús Cueva Niño de Guzmán" userId="56da303013910523" providerId="LiveId" clId="{532B7A48-8887-4F62-9537-0BA1FAE83637}" dt="2026-01-14T23:38:56.003" v="1" actId="47"/>
-        <pc:sldMkLst>
-          <pc:docMk/>
-          <pc:sldMk cId="1741124028" sldId="282"/>
-        </pc:sldMkLst>
+            <ac:graphicFrameMk id="27" creationId="{E2902199-03EA-D12C-1A17-39EA239AECB5}"/>
+          </ac:graphicFrameMkLst>
+        </pc:graphicFrameChg>
       </pc:sldChg>
     </pc:docChg>
   </pc:docChgLst>
@@ -313,7 +317,7 @@
           <a:p>
             <a:fld id="{03C7FEFC-EB52-44D6-B3F1-2A7BB7FA4226}" type="datetimeFigureOut">
               <a:rPr lang="es-PE" smtClean="0"/>
-              <a:t>2/02/2026</a:t>
+              <a:t>7/06/2026</a:t>
             </a:fld>
             <a:endParaRPr lang="es-PE" dirty="0"/>
           </a:p>
@@ -478,7 +482,7 @@
           <a:p>
             <a:fld id="{64955E78-CBAA-441B-9163-D9CD5E983BDA}" type="datetimeFigureOut">
               <a:rPr lang="en-US" smtClean="0"/>
-              <a:t>2/2/2026</a:t>
+              <a:t>6/7/2026</a:t>
             </a:fld>
             <a:endParaRPr lang="en-US" dirty="0"/>
           </a:p>
@@ -877,7 +881,7 @@
           <a:p>
             <a:fld id="{5C4C4E00-4716-4B48-9D97-535E4F94A274}" type="datetimeFigureOut">
               <a:rPr lang="es-PE" smtClean="0"/>
-              <a:t>2/02/2026</a:t>
+              <a:t>7/06/2026</a:t>
             </a:fld>
             <a:endParaRPr lang="es-PE" dirty="0"/>
           </a:p>
@@ -1047,7 +1051,7 @@
           <a:p>
             <a:fld id="{5C4C4E00-4716-4B48-9D97-535E4F94A274}" type="datetimeFigureOut">
               <a:rPr lang="es-PE" smtClean="0"/>
-              <a:t>2/02/2026</a:t>
+              <a:t>7/06/2026</a:t>
             </a:fld>
             <a:endParaRPr lang="es-PE" dirty="0"/>
           </a:p>
@@ -1227,7 +1231,7 @@
           <a:p>
             <a:fld id="{5C4C4E00-4716-4B48-9D97-535E4F94A274}" type="datetimeFigureOut">
               <a:rPr lang="es-PE" smtClean="0"/>
-              <a:t>2/02/2026</a:t>
+              <a:t>7/06/2026</a:t>
             </a:fld>
             <a:endParaRPr lang="es-PE" dirty="0"/>
           </a:p>
@@ -1397,7 +1401,7 @@
           <a:p>
             <a:fld id="{5C4C4E00-4716-4B48-9D97-535E4F94A274}" type="datetimeFigureOut">
               <a:rPr lang="es-PE" smtClean="0"/>
-              <a:t>2/02/2026</a:t>
+              <a:t>7/06/2026</a:t>
             </a:fld>
             <a:endParaRPr lang="es-PE" dirty="0"/>
           </a:p>
@@ -1641,7 +1645,7 @@
           <a:p>
             <a:fld id="{5C4C4E00-4716-4B48-9D97-535E4F94A274}" type="datetimeFigureOut">
               <a:rPr lang="es-PE" smtClean="0"/>
-              <a:t>2/02/2026</a:t>
+              <a:t>7/06/2026</a:t>
             </a:fld>
             <a:endParaRPr lang="es-PE" dirty="0"/>
           </a:p>
@@ -1873,7 +1877,7 @@
           <a:p>
             <a:fld id="{5C4C4E00-4716-4B48-9D97-535E4F94A274}" type="datetimeFigureOut">
               <a:rPr lang="es-PE" smtClean="0"/>
-              <a:t>2/02/2026</a:t>
+              <a:t>7/06/2026</a:t>
             </a:fld>
             <a:endParaRPr lang="es-PE" dirty="0"/>
           </a:p>
@@ -2240,7 +2244,7 @@
           <a:p>
             <a:fld id="{5C4C4E00-4716-4B48-9D97-535E4F94A274}" type="datetimeFigureOut">
               <a:rPr lang="es-PE" smtClean="0"/>
-              <a:t>2/02/2026</a:t>
+              <a:t>7/06/2026</a:t>
             </a:fld>
             <a:endParaRPr lang="es-PE" dirty="0"/>
           </a:p>
@@ -2358,7 +2362,7 @@
           <a:p>
             <a:fld id="{5C4C4E00-4716-4B48-9D97-535E4F94A274}" type="datetimeFigureOut">
               <a:rPr lang="es-PE" smtClean="0"/>
-              <a:t>2/02/2026</a:t>
+              <a:t>7/06/2026</a:t>
             </a:fld>
             <a:endParaRPr lang="es-PE" dirty="0"/>
           </a:p>
@@ -2453,7 +2457,7 @@
           <a:p>
             <a:fld id="{5C4C4E00-4716-4B48-9D97-535E4F94A274}" type="datetimeFigureOut">
               <a:rPr lang="es-PE" smtClean="0"/>
-              <a:t>2/02/2026</a:t>
+              <a:t>7/06/2026</a:t>
             </a:fld>
             <a:endParaRPr lang="es-PE" dirty="0"/>
           </a:p>
@@ -2730,7 +2734,7 @@
           <a:p>
             <a:fld id="{5C4C4E00-4716-4B48-9D97-535E4F94A274}" type="datetimeFigureOut">
               <a:rPr lang="es-PE" smtClean="0"/>
-              <a:t>2/02/2026</a:t>
+              <a:t>7/06/2026</a:t>
             </a:fld>
             <a:endParaRPr lang="es-PE" dirty="0"/>
           </a:p>
@@ -2987,7 +2991,7 @@
           <a:p>
             <a:fld id="{5C4C4E00-4716-4B48-9D97-535E4F94A274}" type="datetimeFigureOut">
               <a:rPr lang="es-PE" smtClean="0"/>
-              <a:t>2/02/2026</a:t>
+              <a:t>7/06/2026</a:t>
             </a:fld>
             <a:endParaRPr lang="es-PE" dirty="0"/>
           </a:p>
@@ -3200,7 +3204,7 @@
           <a:p>
             <a:fld id="{5C4C4E00-4716-4B48-9D97-535E4F94A274}" type="datetimeFigureOut">
               <a:rPr lang="es-PE" smtClean="0"/>
-              <a:t>2/02/2026</a:t>
+              <a:t>7/06/2026</a:t>
             </a:fld>
             <a:endParaRPr lang="es-PE" dirty="0"/>
           </a:p>
@@ -3611,6 +3615,133 @@
           <a:chExt cx="0" cy="0"/>
         </a:xfrm>
       </p:grpSpPr>
+      <p:sp>
+        <p:nvSpPr>
+          <p:cNvPr id="22" name="CuadroTexto 21">
+            <a:extLst>
+              <a:ext uri="{FF2B5EF4-FFF2-40B4-BE49-F238E27FC236}">
+                <a16:creationId xmlns:a16="http://schemas.microsoft.com/office/drawing/2014/main" id="{D6CB106F-7EC0-002A-CEBE-0064B169D038}"/>
+              </a:ext>
+            </a:extLst>
+          </p:cNvPr>
+          <p:cNvSpPr txBox="1"/>
+          <p:nvPr/>
+        </p:nvSpPr>
+        <p:spPr>
+          <a:xfrm>
+            <a:off x="655886" y="8793672"/>
+            <a:ext cx="2506575" cy="438582"/>
+          </a:xfrm>
+          <a:prstGeom prst="rect">
+            <a:avLst/>
+          </a:prstGeom>
+          <a:noFill/>
+        </p:spPr>
+        <p:txBody>
+          <a:bodyPr wrap="square" rtlCol="0">
+            <a:spAutoFit/>
+          </a:bodyPr>
+          <a:lstStyle/>
+          <a:p>
+            <a:pPr algn="ctr"/>
+            <a:r>
+              <a:rPr lang="es-PE" sz="1150" b="1" dirty="0">
+                <a:latin typeface="Arial" panose="020B0604020202020204" pitchFamily="34" charset="0"/>
+                <a:cs typeface="Arial" panose="020B0604020202020204" pitchFamily="34" charset="0"/>
+              </a:rPr>
+              <a:t>CHRISTIAN QUIÑONES CARLOS</a:t>
+            </a:r>
+          </a:p>
+          <a:p>
+            <a:pPr algn="ctr"/>
+            <a:r>
+              <a:rPr lang="es-PE" sz="1100" dirty="0">
+                <a:latin typeface="Arial" panose="020B0604020202020204" pitchFamily="34" charset="0"/>
+                <a:cs typeface="Arial" panose="020B0604020202020204" pitchFamily="34" charset="0"/>
+              </a:rPr>
+              <a:t>DIRECTOR ACADÉMICO</a:t>
+            </a:r>
+          </a:p>
+        </p:txBody>
+      </p:sp>
+      <p:sp>
+        <p:nvSpPr>
+          <p:cNvPr id="23" name="CuadroTexto 22">
+            <a:extLst>
+              <a:ext uri="{FF2B5EF4-FFF2-40B4-BE49-F238E27FC236}">
+                <a16:creationId xmlns:a16="http://schemas.microsoft.com/office/drawing/2014/main" id="{D962536F-CB9F-1938-8F28-5D8C8FE943C7}"/>
+              </a:ext>
+            </a:extLst>
+          </p:cNvPr>
+          <p:cNvSpPr txBox="1"/>
+          <p:nvPr/>
+        </p:nvSpPr>
+        <p:spPr>
+          <a:xfrm>
+            <a:off x="3527927" y="8788850"/>
+            <a:ext cx="2934555" cy="438582"/>
+          </a:xfrm>
+          <a:prstGeom prst="rect">
+            <a:avLst/>
+          </a:prstGeom>
+          <a:noFill/>
+        </p:spPr>
+        <p:txBody>
+          <a:bodyPr wrap="square" rtlCol="0">
+            <a:spAutoFit/>
+          </a:bodyPr>
+          <a:lstStyle/>
+          <a:p>
+            <a:pPr algn="ctr"/>
+            <a:r>
+              <a:rPr lang="es-PE" sz="1150" b="1" dirty="0">
+                <a:latin typeface="Arial" panose="020B0604020202020204" pitchFamily="34" charset="0"/>
+                <a:cs typeface="Arial" panose="020B0604020202020204" pitchFamily="34" charset="0"/>
+              </a:rPr>
+              <a:t>MARÍA AURORA CARLOS DE LA CRUZ</a:t>
+            </a:r>
+          </a:p>
+          <a:p>
+            <a:pPr algn="ctr"/>
+            <a:r>
+              <a:rPr lang="es-PE" sz="1100" dirty="0">
+                <a:latin typeface="Arial" panose="020B0604020202020204" pitchFamily="34" charset="0"/>
+                <a:cs typeface="Arial" panose="020B0604020202020204" pitchFamily="34" charset="0"/>
+              </a:rPr>
+              <a:t>DIRECTORA ADMINISTRATIVA</a:t>
+            </a:r>
+          </a:p>
+        </p:txBody>
+      </p:sp>
+      <p:pic>
+        <p:nvPicPr>
+          <p:cNvPr id="8" name="Imagen 7">
+            <a:extLst>
+              <a:ext uri="{FF2B5EF4-FFF2-40B4-BE49-F238E27FC236}">
+                <a16:creationId xmlns:a16="http://schemas.microsoft.com/office/drawing/2014/main" id="{9F25441A-93BD-74CB-56AE-2B019756F5A7}"/>
+              </a:ext>
+            </a:extLst>
+          </p:cNvPr>
+          <p:cNvPicPr>
+            <a:picLocks noChangeAspect="1"/>
+          </p:cNvPicPr>
+          <p:nvPr/>
+        </p:nvPicPr>
+        <p:blipFill rotWithShape="1">
+          <a:blip r:embed="rId2"/>
+          <a:srcRect b="15237"/>
+          <a:stretch/>
+        </p:blipFill>
+        <p:spPr>
+          <a:xfrm>
+            <a:off x="347662" y="7939316"/>
+            <a:ext cx="6162675" cy="1598588"/>
+          </a:xfrm>
+          <a:prstGeom prst="rect">
+            <a:avLst/>
+          </a:prstGeom>
+        </p:spPr>
+      </p:pic>
       <p:pic>
         <p:nvPicPr>
           <p:cNvPr id="5" name="Imagen 4">
@@ -3626,7 +3757,7 @@
           <p:nvPr/>
         </p:nvPicPr>
         <p:blipFill rotWithShape="1">
-          <a:blip r:embed="rId2" cstate="print">
+          <a:blip r:embed="rId3" cstate="print">
             <a:extLst>
               <a:ext uri="{28A0092B-C50C-407E-A947-70E740481C1C}">
                 <a14:useLocalDpi xmlns:a14="http://schemas.microsoft.com/office/drawing/2010/main" val="0"/>
@@ -3661,7 +3792,7 @@
           <p:nvPr/>
         </p:nvPicPr>
         <p:blipFill rotWithShape="1">
-          <a:blip r:embed="rId3">
+          <a:blip r:embed="rId4">
             <a:lum bright="70000" contrast="-70000"/>
             <a:extLst>
               <a:ext uri="{28A0092B-C50C-407E-A947-70E740481C1C}">
@@ -3696,7 +3827,7 @@
         </p:nvSpPr>
         <p:spPr>
           <a:xfrm>
-            <a:off x="792012" y="3452041"/>
+            <a:off x="792012" y="2807738"/>
             <a:ext cx="5273976" cy="954107"/>
           </a:xfrm>
           <a:prstGeom prst="rect">
@@ -3813,7 +3944,7 @@
           <p:nvPr/>
         </p:nvPicPr>
         <p:blipFill>
-          <a:blip r:embed="rId4" cstate="print">
+          <a:blip r:embed="rId5" cstate="print">
             <a:clrChange>
               <a:clrFrom>
                 <a:srgbClr val="FAFAFA"/>
@@ -3863,8 +3994,8 @@
         </p:nvSpPr>
         <p:spPr>
           <a:xfrm>
-            <a:off x="655886" y="2006584"/>
-            <a:ext cx="5546229" cy="1323439"/>
+            <a:off x="655886" y="2044162"/>
+            <a:ext cx="5546229" cy="707886"/>
           </a:xfrm>
           <a:prstGeom prst="rect">
             <a:avLst/>
@@ -3875,15 +4006,6 @@
             <a:spAutoFit/>
           </a:bodyPr>
           <a:lstStyle/>
-          <a:p>
-            <a:pPr algn="ctr"/>
-            <a:r>
-              <a:rPr lang="es-PE" sz="4000" dirty="0">
-                <a:latin typeface="Algerian" panose="04020705040A02060702" pitchFamily="82" charset="0"/>
-              </a:rPr>
-              <a:t>PROGRAMA DE</a:t>
-            </a:r>
-          </a:p>
           <a:p>
             <a:pPr algn="ctr"/>
             <a:r>
@@ -3912,7 +4034,7 @@
         </p:nvSpPr>
         <p:spPr>
           <a:xfrm>
-            <a:off x="2809279" y="3197491"/>
+            <a:off x="2809279" y="2608769"/>
             <a:ext cx="1239442" cy="306109"/>
           </a:xfrm>
           <a:prstGeom prst="rect">
@@ -3963,370 +4085,6 @@
               <a:latin typeface="Arial" panose="020B0604020202020204" pitchFamily="34" charset="0"/>
               <a:ea typeface="Calibri" panose="020F0502020204030204" pitchFamily="34" charset="0"/>
               <a:cs typeface="Arial" panose="020B0604020202020204" pitchFamily="34" charset="0"/>
-            </a:endParaRPr>
-          </a:p>
-        </p:txBody>
-      </p:sp>
-      <p:sp>
-        <p:nvSpPr>
-          <p:cNvPr id="19" name="Rectangle 60">
-            <a:extLst>
-              <a:ext uri="{FF2B5EF4-FFF2-40B4-BE49-F238E27FC236}">
-                <a16:creationId xmlns:a16="http://schemas.microsoft.com/office/drawing/2014/main" id="{991C4A27-894B-7257-8062-6F839343BAAD}"/>
-              </a:ext>
-            </a:extLst>
-          </p:cNvPr>
-          <p:cNvSpPr/>
-          <p:nvPr/>
-        </p:nvSpPr>
-        <p:spPr>
-          <a:xfrm>
-            <a:off x="570664" y="4554684"/>
-            <a:ext cx="5716673" cy="2967105"/>
-          </a:xfrm>
-          <a:prstGeom prst="rect">
-            <a:avLst/>
-          </a:prstGeom>
-          <a:ln>
-            <a:noFill/>
-          </a:ln>
-        </p:spPr>
-        <p:txBody>
-          <a:bodyPr vert="horz" lIns="0" tIns="0" rIns="0" bIns="0" rtlCol="0" anchor="ctr">
-            <a:noAutofit/>
-          </a:bodyPr>
-          <a:lstStyle/>
-          <a:p>
-            <a:pPr algn="ctr">
-              <a:spcBef>
-                <a:spcPts val="600"/>
-              </a:spcBef>
-            </a:pPr>
-            <a:r>
-              <a:rPr lang="es-PE" sz="1400" dirty="0">
-                <a:solidFill>
-                  <a:srgbClr val="000000"/>
-                </a:solidFill>
-                <a:effectLst/>
-                <a:latin typeface="Times New Roman" panose="02020603050405020304" pitchFamily="18" charset="0"/>
-                <a:ea typeface="Times New Roman" panose="02020603050405020304" pitchFamily="18" charset="0"/>
-                <a:cs typeface="Times New Roman" panose="02020603050405020304" pitchFamily="18" charset="0"/>
-              </a:rPr>
-              <a:t>Por haber culminado satisfactoriamente el PROGRAMA</a:t>
-            </a:r>
-            <a:r>
-              <a:rPr lang="es-PE" sz="1400" dirty="0">
-                <a:solidFill>
-                  <a:srgbClr val="000000"/>
-                </a:solidFill>
-                <a:latin typeface="Times New Roman" panose="02020603050405020304" pitchFamily="18" charset="0"/>
-                <a:ea typeface="Times New Roman" panose="02020603050405020304" pitchFamily="18" charset="0"/>
-                <a:cs typeface="Times New Roman" panose="02020603050405020304" pitchFamily="18" charset="0"/>
-              </a:rPr>
-              <a:t> </a:t>
-            </a:r>
-          </a:p>
-          <a:p>
-            <a:pPr algn="ctr">
-              <a:spcBef>
-                <a:spcPts val="600"/>
-              </a:spcBef>
-            </a:pPr>
-            <a:r>
-              <a:rPr lang="es-PE" sz="1400" dirty="0">
-                <a:solidFill>
-                  <a:srgbClr val="000000"/>
-                </a:solidFill>
-                <a:effectLst/>
-                <a:latin typeface="Times New Roman" panose="02020603050405020304" pitchFamily="18" charset="0"/>
-                <a:ea typeface="Times New Roman" panose="02020603050405020304" pitchFamily="18" charset="0"/>
-                <a:cs typeface="Times New Roman" panose="02020603050405020304" pitchFamily="18" charset="0"/>
-              </a:rPr>
-              <a:t>DE ESPECIALIZACIÓN</a:t>
-            </a:r>
-            <a:r>
-              <a:rPr lang="es-PE" sz="1400" dirty="0">
-                <a:solidFill>
-                  <a:srgbClr val="000000"/>
-                </a:solidFill>
-                <a:latin typeface="Times New Roman" panose="02020603050405020304" pitchFamily="18" charset="0"/>
-                <a:ea typeface="Times New Roman" panose="02020603050405020304" pitchFamily="18" charset="0"/>
-                <a:cs typeface="Times New Roman" panose="02020603050405020304" pitchFamily="18" charset="0"/>
-              </a:rPr>
-              <a:t> e</a:t>
-            </a:r>
-            <a:r>
-              <a:rPr lang="es-PE" sz="1400" dirty="0">
-                <a:solidFill>
-                  <a:srgbClr val="000000"/>
-                </a:solidFill>
-                <a:effectLst/>
-                <a:latin typeface="Times New Roman" panose="02020603050405020304" pitchFamily="18" charset="0"/>
-                <a:ea typeface="Times New Roman" panose="02020603050405020304" pitchFamily="18" charset="0"/>
-                <a:cs typeface="Times New Roman" panose="02020603050405020304" pitchFamily="18" charset="0"/>
-              </a:rPr>
-              <a:t>n:</a:t>
-            </a:r>
-          </a:p>
-          <a:p>
-            <a:pPr algn="ctr">
-              <a:spcBef>
-                <a:spcPts val="600"/>
-              </a:spcBef>
-            </a:pPr>
-            <a:r>
-              <a:rPr lang="es-PE" sz="2800" dirty="0">
-                <a:solidFill>
-                  <a:schemeClr val="tx2">
-                    <a:lumMod val="50000"/>
-                  </a:schemeClr>
-                </a:solidFill>
-                <a:latin typeface="Britannic Bold" panose="020B0903060703020204" pitchFamily="34" charset="0"/>
-                <a:ea typeface="Times New Roman" panose="02020603050405020304" pitchFamily="18" charset="0"/>
-                <a:cs typeface="Simplified Arabic" panose="02020603050405020304" pitchFamily="18" charset="-78"/>
-              </a:rPr>
-              <a:t>“{{TEMA_DIPLOMADO}}</a:t>
-            </a:r>
-            <a:r>
-              <a:rPr lang="es-PE" sz="2800" dirty="0">
-                <a:solidFill>
-                  <a:schemeClr val="tx2">
-                    <a:lumMod val="50000"/>
-                  </a:schemeClr>
-                </a:solidFill>
-                <a:effectLst/>
-                <a:latin typeface="Britannic Bold" panose="020B0903060703020204" pitchFamily="34" charset="0"/>
-                <a:ea typeface="Times New Roman" panose="02020603050405020304" pitchFamily="18" charset="0"/>
-                <a:cs typeface="Simplified Arabic" panose="02020603050405020304" pitchFamily="18" charset="-78"/>
-              </a:rPr>
-              <a:t>”</a:t>
-            </a:r>
-          </a:p>
-          <a:p>
-            <a:pPr algn="ctr">
-              <a:spcBef>
-                <a:spcPts val="600"/>
-              </a:spcBef>
-            </a:pPr>
-            <a:r>
-              <a:rPr lang="es-PE" sz="1400" dirty="0">
-                <a:solidFill>
-                  <a:srgbClr val="000000"/>
-                </a:solidFill>
-                <a:effectLst/>
-                <a:latin typeface="Arial" panose="020B0604020202020204" pitchFamily="34" charset="0"/>
-                <a:ea typeface="Times New Roman" panose="02020603050405020304" pitchFamily="18" charset="0"/>
-                <a:cs typeface="Arial" panose="020B0604020202020204" pitchFamily="34" charset="0"/>
-              </a:rPr>
-              <a:t> </a:t>
-            </a:r>
-            <a:r>
-              <a:rPr lang="es-PE" sz="1400" dirty="0">
-                <a:solidFill>
-                  <a:srgbClr val="000000"/>
-                </a:solidFill>
-                <a:effectLst/>
-                <a:latin typeface="Times New Roman" panose="02020603050405020304" pitchFamily="18" charset="0"/>
-                <a:ea typeface="Times New Roman" panose="02020603050405020304" pitchFamily="18" charset="0"/>
-                <a:cs typeface="Times New Roman" panose="02020603050405020304" pitchFamily="18" charset="0"/>
-              </a:rPr>
-              <a:t>Realizado por el Instituto Peruano de Diplomados y Especializaciones, que mantuvo participación acad</a:t>
-            </a:r>
-            <a:r>
-              <a:rPr lang="es-PE" sz="1400" dirty="0">
-                <a:solidFill>
-                  <a:srgbClr val="000000"/>
-                </a:solidFill>
-                <a:latin typeface="Times New Roman" panose="02020603050405020304" pitchFamily="18" charset="0"/>
-                <a:ea typeface="Times New Roman" panose="02020603050405020304" pitchFamily="18" charset="0"/>
-                <a:cs typeface="Times New Roman" panose="02020603050405020304" pitchFamily="18" charset="0"/>
-              </a:rPr>
-              <a:t>émica con la Escuela de Posgrado de la Universidad Nacional de Trujillo</a:t>
-            </a:r>
-            <a:r>
-              <a:rPr lang="es-PE" sz="1400" dirty="0">
-                <a:solidFill>
-                  <a:srgbClr val="000000"/>
-                </a:solidFill>
-                <a:effectLst/>
-                <a:latin typeface="Times New Roman" panose="02020603050405020304" pitchFamily="18" charset="0"/>
-                <a:ea typeface="Times New Roman" panose="02020603050405020304" pitchFamily="18" charset="0"/>
-                <a:cs typeface="Times New Roman" panose="02020603050405020304" pitchFamily="18" charset="0"/>
-              </a:rPr>
-              <a:t>, según Resolución </a:t>
-            </a:r>
-            <a:r>
-              <a:rPr lang="es-PE" sz="1400" dirty="0">
-                <a:solidFill>
-                  <a:srgbClr val="000000"/>
-                </a:solidFill>
-                <a:latin typeface="Times New Roman" panose="02020603050405020304" pitchFamily="18" charset="0"/>
-                <a:ea typeface="Times New Roman" panose="02020603050405020304" pitchFamily="18" charset="0"/>
-                <a:cs typeface="Times New Roman" panose="02020603050405020304" pitchFamily="18" charset="0"/>
-              </a:rPr>
-              <a:t>Directoral </a:t>
-            </a:r>
-            <a:r>
-              <a:rPr lang="es-PE" sz="1400" dirty="0">
-                <a:solidFill>
-                  <a:srgbClr val="000000"/>
-                </a:solidFill>
-                <a:effectLst/>
-                <a:latin typeface="Times New Roman" panose="02020603050405020304" pitchFamily="18" charset="0"/>
-                <a:ea typeface="Times New Roman" panose="02020603050405020304" pitchFamily="18" charset="0"/>
-                <a:cs typeface="Times New Roman" panose="02020603050405020304" pitchFamily="18" charset="0"/>
-              </a:rPr>
-              <a:t>N° </a:t>
-            </a:r>
-            <a:r>
-              <a:rPr lang="es-PE" sz="1400" dirty="0">
-                <a:solidFill>
-                  <a:srgbClr val="000000"/>
-                </a:solidFill>
-                <a:latin typeface="Times New Roman" panose="02020603050405020304" pitchFamily="18" charset="0"/>
-                <a:ea typeface="Times New Roman" panose="02020603050405020304" pitchFamily="18" charset="0"/>
-                <a:cs typeface="Times New Roman" panose="02020603050405020304" pitchFamily="18" charset="0"/>
-              </a:rPr>
-              <a:t>2477</a:t>
-            </a:r>
-            <a:r>
-              <a:rPr lang="es-PE" sz="1400" dirty="0">
-                <a:solidFill>
-                  <a:srgbClr val="000000"/>
-                </a:solidFill>
-                <a:effectLst/>
-                <a:latin typeface="Times New Roman" panose="02020603050405020304" pitchFamily="18" charset="0"/>
-                <a:ea typeface="Times New Roman" panose="02020603050405020304" pitchFamily="18" charset="0"/>
-                <a:cs typeface="Times New Roman" panose="02020603050405020304" pitchFamily="18" charset="0"/>
-              </a:rPr>
-              <a:t>-2018-EPG/UNT</a:t>
-            </a:r>
-            <a:r>
-              <a:rPr lang="es-PE" sz="1400" dirty="0">
-                <a:solidFill>
-                  <a:srgbClr val="000000"/>
-                </a:solidFill>
-                <a:latin typeface="Times New Roman" panose="02020603050405020304" pitchFamily="18" charset="0"/>
-                <a:ea typeface="Times New Roman" panose="02020603050405020304" pitchFamily="18" charset="0"/>
-                <a:cs typeface="Times New Roman" panose="02020603050405020304" pitchFamily="18" charset="0"/>
-              </a:rPr>
-              <a:t>. R</a:t>
-            </a:r>
-            <a:r>
-              <a:rPr lang="es-PE" sz="1400" dirty="0">
-                <a:solidFill>
-                  <a:srgbClr val="000000"/>
-                </a:solidFill>
-                <a:effectLst/>
-                <a:latin typeface="Times New Roman" panose="02020603050405020304" pitchFamily="18" charset="0"/>
-                <a:ea typeface="Times New Roman" panose="02020603050405020304" pitchFamily="18" charset="0"/>
-                <a:cs typeface="Times New Roman" panose="02020603050405020304" pitchFamily="18" charset="0"/>
-              </a:rPr>
-              <a:t>ealizado </a:t>
-            </a:r>
-            <a:r>
-              <a:rPr lang="es-PE" sz="1400" dirty="0">
-                <a:solidFill>
-                  <a:srgbClr val="000000"/>
-                </a:solidFill>
-                <a:latin typeface="Times New Roman" panose="02020603050405020304" pitchFamily="18" charset="0"/>
-                <a:ea typeface="Times New Roman" panose="02020603050405020304" pitchFamily="18" charset="0"/>
-                <a:cs typeface="Times New Roman" panose="02020603050405020304" pitchFamily="18" charset="0"/>
-              </a:rPr>
-              <a:t>del {{FECHA_INICIO}} al {{FECHA_FIN}}</a:t>
-            </a:r>
-            <a:r>
-              <a:rPr lang="es-PE" sz="1400" dirty="0">
-                <a:solidFill>
-                  <a:srgbClr val="000000"/>
-                </a:solidFill>
-                <a:effectLst/>
-                <a:latin typeface="Times New Roman" panose="02020603050405020304" pitchFamily="18" charset="0"/>
-                <a:ea typeface="Times New Roman" panose="02020603050405020304" pitchFamily="18" charset="0"/>
-                <a:cs typeface="Times New Roman" panose="02020603050405020304" pitchFamily="18" charset="0"/>
-              </a:rPr>
-              <a:t>, con una duración de {{HORAS_ACADEMICAS}} horas académicas, equivalente a {{CREDITOS_ACADEMICOS}} créditos académicos.</a:t>
-            </a:r>
-            <a:endParaRPr lang="es-PE" sz="800" dirty="0">
-              <a:solidFill>
-                <a:srgbClr val="000000"/>
-              </a:solidFill>
-              <a:effectLst/>
-              <a:latin typeface="Times New Roman" panose="02020603050405020304" pitchFamily="18" charset="0"/>
-              <a:ea typeface="Times New Roman" panose="02020603050405020304" pitchFamily="18" charset="0"/>
-              <a:cs typeface="Times New Roman" panose="02020603050405020304" pitchFamily="18" charset="0"/>
-            </a:endParaRPr>
-          </a:p>
-          <a:p>
-            <a:pPr algn="ctr">
-              <a:spcBef>
-                <a:spcPts val="600"/>
-              </a:spcBef>
-            </a:pPr>
-            <a:r>
-              <a:rPr lang="es-PE" sz="1400" dirty="0">
-                <a:latin typeface="Times New Roman" panose="02020603050405020304" pitchFamily="18" charset="0"/>
-                <a:ea typeface="Cambria Math" panose="02040503050406030204" pitchFamily="18" charset="0"/>
-                <a:cs typeface="Times New Roman" panose="02020603050405020304" pitchFamily="18" charset="0"/>
-              </a:rPr>
-              <a:t>Por tanto, se expide el presente {{MODELO_MINUSCULA}} otorgándole los privilegios y consideraciones que le corresponden.</a:t>
-            </a:r>
-          </a:p>
-        </p:txBody>
-      </p:sp>
-      <p:sp>
-        <p:nvSpPr>
-          <p:cNvPr id="7" name="Rectángulo 6">
-            <a:extLst>
-              <a:ext uri="{FF2B5EF4-FFF2-40B4-BE49-F238E27FC236}">
-                <a16:creationId xmlns:a16="http://schemas.microsoft.com/office/drawing/2014/main" id="{F36D8880-B179-580E-0319-C4E9487E072A}"/>
-              </a:ext>
-            </a:extLst>
-          </p:cNvPr>
-          <p:cNvSpPr/>
-          <p:nvPr/>
-        </p:nvSpPr>
-        <p:spPr>
-          <a:xfrm>
-            <a:off x="3075083" y="7543954"/>
-            <a:ext cx="3359480" cy="320280"/>
-          </a:xfrm>
-          <a:prstGeom prst="rect">
-            <a:avLst/>
-          </a:prstGeom>
-        </p:spPr>
-        <p:txBody>
-          <a:bodyPr wrap="square">
-            <a:spAutoFit/>
-          </a:bodyPr>
-          <a:lstStyle/>
-          <a:p>
-            <a:pPr lvl="0" algn="r">
-              <a:lnSpc>
-                <a:spcPct val="115000"/>
-              </a:lnSpc>
-              <a:spcBef>
-                <a:spcPts val="59"/>
-              </a:spcBef>
-            </a:pPr>
-            <a:r>
-              <a:rPr lang="es-PE" sz="1400" dirty="0">
-                <a:solidFill>
-                  <a:prstClr val="black"/>
-                </a:solidFill>
-                <a:latin typeface="Times New Roman" panose="02020603050405020304" pitchFamily="18" charset="0"/>
-                <a:ea typeface="Cambria Math" panose="02040503050406030204" pitchFamily="18" charset="0"/>
-                <a:cs typeface="Times New Roman" panose="02020603050405020304" pitchFamily="18" charset="0"/>
-              </a:rPr>
-              <a:t>Trujillo, {{FECHA_EMISION_LARGA}}</a:t>
-            </a:r>
-            <a:endParaRPr lang="en-US" sz="1400" dirty="0">
-              <a:solidFill>
-                <a:prstClr val="black"/>
-              </a:solidFill>
-              <a:latin typeface="Times New Roman" panose="02020603050405020304" pitchFamily="18" charset="0"/>
-              <a:ea typeface="Cambria Math" panose="02040503050406030204" pitchFamily="18" charset="0"/>
-              <a:cs typeface="Times New Roman" panose="02020603050405020304" pitchFamily="18" charset="0"/>
             </a:endParaRPr>
           </a:p>
         </p:txBody>
@@ -4397,7 +4155,7 @@
           <p:nvPr/>
         </p:nvPicPr>
         <p:blipFill rotWithShape="1">
-          <a:blip r:embed="rId5" cstate="print">
+          <a:blip r:embed="rId6" cstate="print">
             <a:extLst>
               <a:ext uri="{28A0092B-C50C-407E-A947-70E740481C1C}">
                 <a14:useLocalDpi xmlns:a14="http://schemas.microsoft.com/office/drawing/2010/main" val="0"/>
@@ -4419,104 +4177,6 @@
       </p:pic>
       <p:sp>
         <p:nvSpPr>
-          <p:cNvPr id="22" name="CuadroTexto 21">
-            <a:extLst>
-              <a:ext uri="{FF2B5EF4-FFF2-40B4-BE49-F238E27FC236}">
-                <a16:creationId xmlns:a16="http://schemas.microsoft.com/office/drawing/2014/main" id="{D6CB106F-7EC0-002A-CEBE-0064B169D038}"/>
-              </a:ext>
-            </a:extLst>
-          </p:cNvPr>
-          <p:cNvSpPr txBox="1"/>
-          <p:nvPr/>
-        </p:nvSpPr>
-        <p:spPr>
-          <a:xfrm>
-            <a:off x="655886" y="8793672"/>
-            <a:ext cx="2506575" cy="438582"/>
-          </a:xfrm>
-          <a:prstGeom prst="rect">
-            <a:avLst/>
-          </a:prstGeom>
-          <a:noFill/>
-        </p:spPr>
-        <p:txBody>
-          <a:bodyPr wrap="square" rtlCol="0">
-            <a:spAutoFit/>
-          </a:bodyPr>
-          <a:lstStyle/>
-          <a:p>
-            <a:pPr algn="ctr"/>
-            <a:r>
-              <a:rPr lang="es-PE" sz="1150" b="1" dirty="0">
-                <a:latin typeface="Arial" panose="020B0604020202020204" pitchFamily="34" charset="0"/>
-                <a:cs typeface="Arial" panose="020B0604020202020204" pitchFamily="34" charset="0"/>
-              </a:rPr>
-              <a:t>CHRISTIAN QUIÑONES CARLOS</a:t>
-            </a:r>
-          </a:p>
-          <a:p>
-            <a:pPr algn="ctr"/>
-            <a:r>
-              <a:rPr lang="es-PE" sz="1100" dirty="0">
-                <a:latin typeface="Arial" panose="020B0604020202020204" pitchFamily="34" charset="0"/>
-                <a:cs typeface="Arial" panose="020B0604020202020204" pitchFamily="34" charset="0"/>
-              </a:rPr>
-              <a:t>DIRECTOR ACADÉMICO</a:t>
-            </a:r>
-          </a:p>
-        </p:txBody>
-      </p:sp>
-      <p:sp>
-        <p:nvSpPr>
-          <p:cNvPr id="23" name="CuadroTexto 22">
-            <a:extLst>
-              <a:ext uri="{FF2B5EF4-FFF2-40B4-BE49-F238E27FC236}">
-                <a16:creationId xmlns:a16="http://schemas.microsoft.com/office/drawing/2014/main" id="{D962536F-CB9F-1938-8F28-5D8C8FE943C7}"/>
-              </a:ext>
-            </a:extLst>
-          </p:cNvPr>
-          <p:cNvSpPr txBox="1"/>
-          <p:nvPr/>
-        </p:nvSpPr>
-        <p:spPr>
-          <a:xfrm>
-            <a:off x="3527927" y="8788850"/>
-            <a:ext cx="2934555" cy="438582"/>
-          </a:xfrm>
-          <a:prstGeom prst="rect">
-            <a:avLst/>
-          </a:prstGeom>
-          <a:noFill/>
-        </p:spPr>
-        <p:txBody>
-          <a:bodyPr wrap="square" rtlCol="0">
-            <a:spAutoFit/>
-          </a:bodyPr>
-          <a:lstStyle/>
-          <a:p>
-            <a:pPr algn="ctr"/>
-            <a:r>
-              <a:rPr lang="es-PE" sz="1150" b="1" dirty="0">
-                <a:latin typeface="Arial" panose="020B0604020202020204" pitchFamily="34" charset="0"/>
-                <a:cs typeface="Arial" panose="020B0604020202020204" pitchFamily="34" charset="0"/>
-              </a:rPr>
-              <a:t>MARÍA AURORA CARLOS DE LA CRUZ</a:t>
-            </a:r>
-          </a:p>
-          <a:p>
-            <a:pPr algn="ctr"/>
-            <a:r>
-              <a:rPr lang="es-PE" sz="1100" dirty="0">
-                <a:latin typeface="Arial" panose="020B0604020202020204" pitchFamily="34" charset="0"/>
-                <a:cs typeface="Arial" panose="020B0604020202020204" pitchFamily="34" charset="0"/>
-              </a:rPr>
-              <a:t>DIRECTORA ADMINISTRATIVA</a:t>
-            </a:r>
-          </a:p>
-        </p:txBody>
-      </p:sp>
-      <p:sp>
-        <p:nvSpPr>
           <p:cNvPr id="9" name="AutoShape 4" descr="blob:https://web.whatsapp.com/34fb4399-25ce-4206-a049-279514aee91f">
             <a:extLst>
               <a:ext uri="{FF2B5EF4-FFF2-40B4-BE49-F238E27FC236}">
@@ -4560,35 +4220,332 @@
           </a:p>
         </p:txBody>
       </p:sp>
-      <p:pic>
-        <p:nvPicPr>
-          <p:cNvPr id="8" name="Imagen 7">
+      <p:sp>
+        <p:nvSpPr>
+          <p:cNvPr id="19" name="PH_CONTENIDO_PRINCIPAL">
             <a:extLst>
               <a:ext uri="{FF2B5EF4-FFF2-40B4-BE49-F238E27FC236}">
-                <a16:creationId xmlns:a16="http://schemas.microsoft.com/office/drawing/2014/main" id="{9F25441A-93BD-74CB-56AE-2B019756F5A7}"/>
+                <a16:creationId xmlns:a16="http://schemas.microsoft.com/office/drawing/2014/main" id="{991C4A27-894B-7257-8062-6F839343BAAD}"/>
               </a:ext>
             </a:extLst>
           </p:cNvPr>
-          <p:cNvPicPr>
-            <a:picLocks noChangeAspect="1"/>
-          </p:cNvPicPr>
+          <p:cNvSpPr/>
           <p:nvPr/>
-        </p:nvPicPr>
-        <p:blipFill rotWithShape="1">
-          <a:blip r:embed="rId6"/>
-          <a:srcRect b="15237"/>
-          <a:stretch/>
-        </p:blipFill>
+        </p:nvSpPr>
         <p:spPr>
           <a:xfrm>
-            <a:off x="347662" y="7939316"/>
-            <a:ext cx="6162675" cy="1598588"/>
+            <a:off x="419400" y="3697101"/>
+            <a:ext cx="6019200" cy="3108543"/>
           </a:xfrm>
           <a:prstGeom prst="rect">
             <a:avLst/>
           </a:prstGeom>
+          <a:ln>
+            <a:noFill/>
+          </a:ln>
         </p:spPr>
-      </p:pic>
+        <p:txBody>
+          <a:bodyPr vert="horz" lIns="0" tIns="0" rIns="0" bIns="0" rtlCol="0" anchor="t" anchorCtr="1">
+            <a:spAutoFit/>
+          </a:bodyPr>
+          <a:lstStyle/>
+          <a:p>
+            <a:pPr algn="ctr">
+              <a:spcBef>
+                <a:spcPts val="600"/>
+              </a:spcBef>
+            </a:pPr>
+            <a:r>
+              <a:rPr lang="es-PE" sz="1400" dirty="0">
+                <a:solidFill>
+                  <a:srgbClr val="000000"/>
+                </a:solidFill>
+                <a:effectLst/>
+                <a:latin typeface="Times New Roman" panose="02020603050405020304" pitchFamily="18" charset="0"/>
+                <a:ea typeface="Times New Roman" panose="02020603050405020304" pitchFamily="18" charset="0"/>
+                <a:cs typeface="Times New Roman" panose="02020603050405020304" pitchFamily="18" charset="0"/>
+              </a:rPr>
+              <a:t>Por haber culminado satisfactoriamente </a:t>
+            </a:r>
+            <a:r>
+              <a:rPr lang="es-PE" sz="1400" dirty="0">
+                <a:solidFill>
+                  <a:srgbClr val="000000"/>
+                </a:solidFill>
+                <a:latin typeface="Times New Roman" panose="02020603050405020304" pitchFamily="18" charset="0"/>
+                <a:ea typeface="Times New Roman" panose="02020603050405020304" pitchFamily="18" charset="0"/>
+                <a:cs typeface="Times New Roman" panose="02020603050405020304" pitchFamily="18" charset="0"/>
+              </a:rPr>
+              <a:t>la</a:t>
+            </a:r>
+            <a:r>
+              <a:rPr lang="es-PE" sz="1400" dirty="0">
+                <a:solidFill>
+                  <a:srgbClr val="000000"/>
+                </a:solidFill>
+                <a:effectLst/>
+                <a:latin typeface="Times New Roman" panose="02020603050405020304" pitchFamily="18" charset="0"/>
+                <a:ea typeface="Times New Roman" panose="02020603050405020304" pitchFamily="18" charset="0"/>
+                <a:cs typeface="Times New Roman" panose="02020603050405020304" pitchFamily="18" charset="0"/>
+              </a:rPr>
+              <a:t> ESPECIALIZACIÓN</a:t>
+            </a:r>
+            <a:r>
+              <a:rPr lang="es-PE" sz="1400" dirty="0">
+                <a:solidFill>
+                  <a:srgbClr val="000000"/>
+                </a:solidFill>
+                <a:latin typeface="Times New Roman" panose="02020603050405020304" pitchFamily="18" charset="0"/>
+                <a:ea typeface="Times New Roman" panose="02020603050405020304" pitchFamily="18" charset="0"/>
+                <a:cs typeface="Times New Roman" panose="02020603050405020304" pitchFamily="18" charset="0"/>
+              </a:rPr>
+              <a:t> e</a:t>
+            </a:r>
+            <a:r>
+              <a:rPr lang="es-PE" sz="1400" dirty="0">
+                <a:solidFill>
+                  <a:srgbClr val="000000"/>
+                </a:solidFill>
+                <a:effectLst/>
+                <a:latin typeface="Times New Roman" panose="02020603050405020304" pitchFamily="18" charset="0"/>
+                <a:ea typeface="Times New Roman" panose="02020603050405020304" pitchFamily="18" charset="0"/>
+                <a:cs typeface="Times New Roman" panose="02020603050405020304" pitchFamily="18" charset="0"/>
+              </a:rPr>
+              <a:t>n:</a:t>
+            </a:r>
+          </a:p>
+          <a:p>
+            <a:pPr algn="ctr">
+              <a:spcBef>
+                <a:spcPts val="600"/>
+              </a:spcBef>
+            </a:pPr>
+            <a:r>
+              <a:rPr lang="es-PE" sz="2800" dirty="0">
+                <a:solidFill>
+                  <a:schemeClr val="tx2">
+                    <a:lumMod val="50000"/>
+                  </a:schemeClr>
+                </a:solidFill>
+                <a:latin typeface="Britannic Bold" panose="020B0903060703020204" pitchFamily="34" charset="0"/>
+                <a:ea typeface="Times New Roman" panose="02020603050405020304" pitchFamily="18" charset="0"/>
+                <a:cs typeface="Simplified Arabic" panose="02020603050405020304" pitchFamily="18" charset="-78"/>
+              </a:rPr>
+              <a:t>“{{TEMA_DIPLOMADO}}</a:t>
+            </a:r>
+            <a:r>
+              <a:rPr lang="es-PE" sz="2800" dirty="0">
+                <a:solidFill>
+                  <a:schemeClr val="tx2">
+                    <a:lumMod val="50000"/>
+                  </a:schemeClr>
+                </a:solidFill>
+                <a:effectLst/>
+                <a:latin typeface="Britannic Bold" panose="020B0903060703020204" pitchFamily="34" charset="0"/>
+                <a:ea typeface="Times New Roman" panose="02020603050405020304" pitchFamily="18" charset="0"/>
+                <a:cs typeface="Simplified Arabic" panose="02020603050405020304" pitchFamily="18" charset="-78"/>
+              </a:rPr>
+              <a:t>”</a:t>
+            </a:r>
+          </a:p>
+          <a:p>
+            <a:pPr algn="ctr">
+              <a:spcBef>
+                <a:spcPts val="600"/>
+              </a:spcBef>
+            </a:pPr>
+            <a:r>
+              <a:rPr lang="es-PE" sz="1400" dirty="0">
+                <a:solidFill>
+                  <a:srgbClr val="000000"/>
+                </a:solidFill>
+                <a:effectLst/>
+                <a:latin typeface="Arial" panose="020B0604020202020204" pitchFamily="34" charset="0"/>
+                <a:ea typeface="Times New Roman" panose="02020603050405020304" pitchFamily="18" charset="0"/>
+                <a:cs typeface="Arial" panose="020B0604020202020204" pitchFamily="34" charset="0"/>
+              </a:rPr>
+              <a:t> </a:t>
+            </a:r>
+            <a:r>
+              <a:rPr lang="es-PE" sz="1400" dirty="0">
+                <a:solidFill>
+                  <a:srgbClr val="000000"/>
+                </a:solidFill>
+                <a:effectLst/>
+                <a:latin typeface="Times New Roman" panose="02020603050405020304" pitchFamily="18" charset="0"/>
+                <a:ea typeface="Times New Roman" panose="02020603050405020304" pitchFamily="18" charset="0"/>
+                <a:cs typeface="Times New Roman" panose="02020603050405020304" pitchFamily="18" charset="0"/>
+              </a:rPr>
+              <a:t>Realizado por el Instituto Peruano de Diplomados y Especializaciones, que mantuvo participación acad</a:t>
+            </a:r>
+            <a:r>
+              <a:rPr lang="es-PE" sz="1400" dirty="0">
+                <a:solidFill>
+                  <a:srgbClr val="000000"/>
+                </a:solidFill>
+                <a:latin typeface="Times New Roman" panose="02020603050405020304" pitchFamily="18" charset="0"/>
+                <a:ea typeface="Times New Roman" panose="02020603050405020304" pitchFamily="18" charset="0"/>
+                <a:cs typeface="Times New Roman" panose="02020603050405020304" pitchFamily="18" charset="0"/>
+              </a:rPr>
+              <a:t>émica con la Escuela de Posgrado de la Universidad Nacional de Trujillo</a:t>
+            </a:r>
+            <a:r>
+              <a:rPr lang="es-PE" sz="1400" dirty="0">
+                <a:solidFill>
+                  <a:srgbClr val="000000"/>
+                </a:solidFill>
+                <a:effectLst/>
+                <a:latin typeface="Times New Roman" panose="02020603050405020304" pitchFamily="18" charset="0"/>
+                <a:ea typeface="Times New Roman" panose="02020603050405020304" pitchFamily="18" charset="0"/>
+                <a:cs typeface="Times New Roman" panose="02020603050405020304" pitchFamily="18" charset="0"/>
+              </a:rPr>
+              <a:t>, según Resolución </a:t>
+            </a:r>
+            <a:r>
+              <a:rPr lang="es-PE" sz="1400" dirty="0">
+                <a:solidFill>
+                  <a:srgbClr val="000000"/>
+                </a:solidFill>
+                <a:latin typeface="Times New Roman" panose="02020603050405020304" pitchFamily="18" charset="0"/>
+                <a:ea typeface="Times New Roman" panose="02020603050405020304" pitchFamily="18" charset="0"/>
+                <a:cs typeface="Times New Roman" panose="02020603050405020304" pitchFamily="18" charset="0"/>
+              </a:rPr>
+              <a:t>Directoral </a:t>
+            </a:r>
+            <a:r>
+              <a:rPr lang="es-PE" sz="1400" dirty="0">
+                <a:solidFill>
+                  <a:srgbClr val="000000"/>
+                </a:solidFill>
+                <a:effectLst/>
+                <a:latin typeface="Times New Roman" panose="02020603050405020304" pitchFamily="18" charset="0"/>
+                <a:ea typeface="Times New Roman" panose="02020603050405020304" pitchFamily="18" charset="0"/>
+                <a:cs typeface="Times New Roman" panose="02020603050405020304" pitchFamily="18" charset="0"/>
+              </a:rPr>
+              <a:t>N° </a:t>
+            </a:r>
+            <a:r>
+              <a:rPr lang="es-PE" sz="1400" dirty="0">
+                <a:solidFill>
+                  <a:srgbClr val="000000"/>
+                </a:solidFill>
+                <a:latin typeface="Times New Roman" panose="02020603050405020304" pitchFamily="18" charset="0"/>
+                <a:ea typeface="Times New Roman" panose="02020603050405020304" pitchFamily="18" charset="0"/>
+                <a:cs typeface="Times New Roman" panose="02020603050405020304" pitchFamily="18" charset="0"/>
+              </a:rPr>
+              <a:t>2477</a:t>
+            </a:r>
+            <a:r>
+              <a:rPr lang="es-PE" sz="1400" dirty="0">
+                <a:solidFill>
+                  <a:srgbClr val="000000"/>
+                </a:solidFill>
+                <a:effectLst/>
+                <a:latin typeface="Times New Roman" panose="02020603050405020304" pitchFamily="18" charset="0"/>
+                <a:ea typeface="Times New Roman" panose="02020603050405020304" pitchFamily="18" charset="0"/>
+                <a:cs typeface="Times New Roman" panose="02020603050405020304" pitchFamily="18" charset="0"/>
+              </a:rPr>
+              <a:t>-2018-EPG/UNT</a:t>
+            </a:r>
+            <a:r>
+              <a:rPr lang="es-PE" sz="1400" dirty="0">
+                <a:solidFill>
+                  <a:srgbClr val="000000"/>
+                </a:solidFill>
+                <a:latin typeface="Times New Roman" panose="02020603050405020304" pitchFamily="18" charset="0"/>
+                <a:ea typeface="Times New Roman" panose="02020603050405020304" pitchFamily="18" charset="0"/>
+                <a:cs typeface="Times New Roman" panose="02020603050405020304" pitchFamily="18" charset="0"/>
+              </a:rPr>
+              <a:t>. R</a:t>
+            </a:r>
+            <a:r>
+              <a:rPr lang="es-PE" sz="1400" dirty="0">
+                <a:solidFill>
+                  <a:srgbClr val="000000"/>
+                </a:solidFill>
+                <a:effectLst/>
+                <a:latin typeface="Times New Roman" panose="02020603050405020304" pitchFamily="18" charset="0"/>
+                <a:ea typeface="Times New Roman" panose="02020603050405020304" pitchFamily="18" charset="0"/>
+                <a:cs typeface="Times New Roman" panose="02020603050405020304" pitchFamily="18" charset="0"/>
+              </a:rPr>
+              <a:t>ealizado </a:t>
+            </a:r>
+            <a:r>
+              <a:rPr lang="es-PE" sz="1400" dirty="0">
+                <a:solidFill>
+                  <a:srgbClr val="000000"/>
+                </a:solidFill>
+                <a:latin typeface="Times New Roman" panose="02020603050405020304" pitchFamily="18" charset="0"/>
+                <a:ea typeface="Times New Roman" panose="02020603050405020304" pitchFamily="18" charset="0"/>
+                <a:cs typeface="Times New Roman" panose="02020603050405020304" pitchFamily="18" charset="0"/>
+              </a:rPr>
+              <a:t>del {{FECHA_INICIO}} al {{FECHA_FIN}}</a:t>
+            </a:r>
+            <a:r>
+              <a:rPr lang="es-PE" sz="1400" dirty="0">
+                <a:solidFill>
+                  <a:srgbClr val="000000"/>
+                </a:solidFill>
+                <a:effectLst/>
+                <a:latin typeface="Times New Roman" panose="02020603050405020304" pitchFamily="18" charset="0"/>
+                <a:ea typeface="Times New Roman" panose="02020603050405020304" pitchFamily="18" charset="0"/>
+                <a:cs typeface="Times New Roman" panose="02020603050405020304" pitchFamily="18" charset="0"/>
+              </a:rPr>
+              <a:t>, con una duración de {{HORAS_ACADEMICAS}} horas académicas, equivalente a {{CREDITOS_ACADEMICOS}} créditos académicos.</a:t>
+            </a:r>
+            <a:endParaRPr lang="es-PE" sz="800" dirty="0">
+              <a:solidFill>
+                <a:srgbClr val="000000"/>
+              </a:solidFill>
+              <a:effectLst/>
+              <a:latin typeface="Times New Roman" panose="02020603050405020304" pitchFamily="18" charset="0"/>
+              <a:ea typeface="Times New Roman" panose="02020603050405020304" pitchFamily="18" charset="0"/>
+              <a:cs typeface="Times New Roman" panose="02020603050405020304" pitchFamily="18" charset="0"/>
+            </a:endParaRPr>
+          </a:p>
+          <a:p>
+            <a:pPr algn="ctr">
+              <a:spcBef>
+                <a:spcPts val="600"/>
+              </a:spcBef>
+            </a:pPr>
+            <a:r>
+              <a:rPr lang="es-PE" sz="1400" dirty="0">
+                <a:latin typeface="Times New Roman" panose="02020603050405020304" pitchFamily="18" charset="0"/>
+                <a:ea typeface="Cambria Math" panose="02040503050406030204" pitchFamily="18" charset="0"/>
+                <a:cs typeface="Times New Roman" panose="02020603050405020304" pitchFamily="18" charset="0"/>
+              </a:rPr>
+              <a:t>Por tanto, se expide la presente Especialización otorgándole los privilegios y consideraciones que le corresponden.</a:t>
+            </a:r>
+          </a:p>
+          <a:p>
+            <a:pPr algn="ctr">
+              <a:spcBef>
+                <a:spcPts val="600"/>
+              </a:spcBef>
+            </a:pPr>
+            <a:r>
+              <a:rPr lang="es-PE" sz="1400" dirty="0">
+                <a:solidFill>
+                  <a:prstClr val="black"/>
+                </a:solidFill>
+                <a:latin typeface="Times New Roman" panose="02020603050405020304" pitchFamily="18" charset="0"/>
+                <a:ea typeface="Cambria Math" panose="02040503050406030204" pitchFamily="18" charset="0"/>
+                <a:cs typeface="Times New Roman" panose="02020603050405020304" pitchFamily="18" charset="0"/>
+              </a:rPr>
+              <a:t>                                                                            {{CIUDAD}}, {{FECHA_EMISION_LARGA}}</a:t>
+            </a:r>
+            <a:endParaRPr lang="en-US" sz="1400" dirty="0">
+              <a:solidFill>
+                <a:prstClr val="black"/>
+              </a:solidFill>
+              <a:latin typeface="Times New Roman" panose="02020603050405020304" pitchFamily="18" charset="0"/>
+              <a:ea typeface="Cambria Math" panose="02040503050406030204" pitchFamily="18" charset="0"/>
+              <a:cs typeface="Times New Roman" panose="02020603050405020304" pitchFamily="18" charset="0"/>
+            </a:endParaRPr>
+          </a:p>
+        </p:txBody>
+      </p:sp>
     </p:spTree>
     <p:extLst>
       <p:ext uri="{BB962C8B-B14F-4D97-AF65-F5344CB8AC3E}">
@@ -5059,7 +5016,7 @@
       </p:pic>
       <p:sp>
         <p:nvSpPr>
-          <p:cNvPr id="11" name="CuadroTexto 10">
+          <p:cNvPr id="11" name="PH_TEMA">
             <a:extLst>
               <a:ext uri="{FF2B5EF4-FFF2-40B4-BE49-F238E27FC236}">
                 <a16:creationId xmlns:a16="http://schemas.microsoft.com/office/drawing/2014/main" id="{6A9C3E86-51AE-E415-AE46-871F1395CD67}"/>
@@ -5214,17 +5171,10 @@
                 <a:latin typeface="Arial" pitchFamily="34" charset="0"/>
                 <a:cs typeface="Arial" pitchFamily="34" charset="0"/>
               </a:rPr>
-              <a:t>PROGRAMA </a:t>
-            </a:r>
-            <a:r>
-              <a:rPr lang="es-ES" sz="1400" b="1">
-                <a:latin typeface="Arial" pitchFamily="34" charset="0"/>
-                <a:cs typeface="Arial" pitchFamily="34" charset="0"/>
-              </a:rPr>
-              <a:t>DE ESPECIALIZACIÓN: </a:t>
-            </a:r>
-            <a:r>
-              <a:rPr lang="es-ES" sz="1400">
+              <a:t>ESPECIALIZACIÓN: </a:t>
+            </a:r>
+            <a:r>
+              <a:rPr lang="es-ES" sz="1400" dirty="0">
                 <a:latin typeface="Arial" pitchFamily="34" charset="0"/>
                 <a:cs typeface="Arial" pitchFamily="34" charset="0"/>
               </a:rPr>
@@ -5442,70 +5392,9 @@
           </p:txBody>
         </p:sp>
       </p:grpSp>
-      <p:sp>
-        <p:nvSpPr>
-          <p:cNvPr id="25" name="Rectángulo 24">
-            <a:extLst>
-              <a:ext uri="{FF2B5EF4-FFF2-40B4-BE49-F238E27FC236}">
-                <a16:creationId xmlns:a16="http://schemas.microsoft.com/office/drawing/2014/main" id="{1BD7C6F0-73B6-617B-0B21-594BAED95EBF}"/>
-              </a:ext>
-            </a:extLst>
-          </p:cNvPr>
-          <p:cNvSpPr/>
-          <p:nvPr/>
-        </p:nvSpPr>
-        <p:spPr>
-          <a:xfrm>
-            <a:off x="4541929" y="8673847"/>
-            <a:ext cx="2130198" cy="366767"/>
-          </a:xfrm>
-          <a:prstGeom prst="rect">
-            <a:avLst/>
-          </a:prstGeom>
-        </p:spPr>
-        <p:txBody>
-          <a:bodyPr wrap="square">
-            <a:spAutoFit/>
-          </a:bodyPr>
-          <a:lstStyle/>
-          <a:p>
-            <a:pPr lvl="0" algn="ctr">
-              <a:spcBef>
-                <a:spcPts val="59"/>
-              </a:spcBef>
-            </a:pPr>
-            <a:r>
-              <a:rPr lang="es-PE" sz="900" dirty="0">
-                <a:solidFill>
-                  <a:prstClr val="black"/>
-                </a:solidFill>
-                <a:latin typeface="Times New Roman" panose="02020603050405020304" pitchFamily="18" charset="0"/>
-                <a:ea typeface="Cambria Math" panose="02040503050406030204" pitchFamily="18" charset="0"/>
-                <a:cs typeface="Times New Roman" panose="02020603050405020304" pitchFamily="18" charset="0"/>
-              </a:rPr>
-              <a:t>CÓDIGO ESTUDIANTE:</a:t>
-            </a:r>
-          </a:p>
-          <a:p>
-            <a:pPr lvl="0" algn="ctr">
-              <a:spcBef>
-                <a:spcPts val="59"/>
-              </a:spcBef>
-            </a:pPr>
-            <a:endParaRPr lang="en-US" sz="800" b="1" dirty="0">
-              <a:solidFill>
-                <a:prstClr val="black"/>
-              </a:solidFill>
-              <a:latin typeface="Times New Roman" panose="02020603050405020304" pitchFamily="18" charset="0"/>
-              <a:ea typeface="Cambria Math" panose="02040503050406030204" pitchFamily="18" charset="0"/>
-              <a:cs typeface="Times New Roman" panose="02020603050405020304" pitchFamily="18" charset="0"/>
-            </a:endParaRPr>
-          </a:p>
-        </p:txBody>
-      </p:sp>
       <p:graphicFrame>
         <p:nvGraphicFramePr>
-          <p:cNvPr id="27" name="Tabla 26">
+          <p:cNvPr id="27" name="PH_TABLA">
             <a:extLst>
               <a:ext uri="{FF2B5EF4-FFF2-40B4-BE49-F238E27FC236}">
                 <a16:creationId xmlns:a16="http://schemas.microsoft.com/office/drawing/2014/main" id="{E2902199-03EA-D12C-1A17-39EA239AECB5}"/>
@@ -5518,14 +5407,14 @@
           <p:nvPr>
             <p:extLst>
               <p:ext uri="{D42A27DB-BD31-4B8C-83A1-F6EECF244321}">
-                <p14:modId xmlns:p14="http://schemas.microsoft.com/office/powerpoint/2010/main" val="1514904196"/>
+                <p14:modId xmlns:p14="http://schemas.microsoft.com/office/powerpoint/2010/main" val="294246029"/>
               </p:ext>
             </p:extLst>
           </p:nvPr>
         </p:nvGraphicFramePr>
         <p:xfrm>
-          <a:off x="745017" y="3109557"/>
-          <a:ext cx="5367967" cy="4710006"/>
+          <a:off x="675000" y="2921299"/>
+          <a:ext cx="5508000" cy="4710006"/>
         </p:xfrm>
         <a:graphic>
           <a:graphicData uri="http://schemas.openxmlformats.org/drawingml/2006/table">
@@ -5534,21 +5423,21 @@
                 <a:tableStyleId>{D7AC3CCA-C797-4891-BE02-D94E43425B78}</a:tableStyleId>
               </a:tblPr>
               <a:tblGrid>
-                <a:gridCol w="1449715">
+                <a:gridCol w="1487532">
                   <a:extLst>
                     <a:ext uri="{9D8B030D-6E8A-4147-A177-3AD203B41FA5}">
                       <a16:colId xmlns:a16="http://schemas.microsoft.com/office/drawing/2014/main" val="1484549653"/>
                     </a:ext>
                   </a:extLst>
                 </a:gridCol>
-                <a:gridCol w="2678906">
+                <a:gridCol w="2748790">
                   <a:extLst>
                     <a:ext uri="{9D8B030D-6E8A-4147-A177-3AD203B41FA5}">
                       <a16:colId xmlns:a16="http://schemas.microsoft.com/office/drawing/2014/main" val="1352610699"/>
                     </a:ext>
                   </a:extLst>
                 </a:gridCol>
-                <a:gridCol w="1239346">
+                <a:gridCol w="1271678">
                   <a:extLst>
                     <a:ext uri="{9D8B030D-6E8A-4147-A177-3AD203B41FA5}">
                       <a16:colId xmlns:a16="http://schemas.microsoft.com/office/drawing/2014/main" val="3793606720"/>
@@ -5703,7 +5592,7 @@
                     <a:p>
                       <a:pPr algn="ctr"/>
                       <a:r>
-                        <a:rPr lang="es-ES" sz="1000" dirty="0"/>
+                        <a:rPr lang="es-ES" sz="900" dirty="0"/>
                         <a:t>{{MODULO_1}}</a:t>
                       </a:r>
                     </a:p>
@@ -5796,7 +5685,7 @@
                         <a:defRPr/>
                       </a:pPr>
                       <a:r>
-                        <a:rPr lang="es-ES" sz="1000" dirty="0"/>
+                        <a:rPr lang="es-ES" sz="900" dirty="0"/>
                         <a:t>{{MODULO_2}}</a:t>
                       </a:r>
                     </a:p>
@@ -5873,7 +5762,7 @@
                         <a:defRPr/>
                       </a:pPr>
                       <a:r>
-                        <a:rPr lang="es-ES" sz="1000" dirty="0"/>
+                        <a:rPr lang="es-ES" sz="900" dirty="0"/>
                         <a:t>{{MODULO_3}}</a:t>
                       </a:r>
                     </a:p>
@@ -5966,10 +5855,10 @@
                         <a:defRPr/>
                       </a:pPr>
                       <a:r>
-                        <a:rPr lang="es-ES" sz="1000" dirty="0"/>
+                        <a:rPr lang="es-ES" sz="900" dirty="0"/>
                         <a:t>{{MODULO_4}}</a:t>
                       </a:r>
-                      <a:endParaRPr lang="es-ES" sz="1000" b="0" i="0" kern="1200" dirty="0">
+                      <a:endParaRPr lang="es-ES" sz="900" b="0" i="0" kern="1200" dirty="0">
                         <a:solidFill>
                           <a:schemeClr val="dk1"/>
                         </a:solidFill>
@@ -6068,7 +5957,7 @@
                         <a:defRPr/>
                       </a:pPr>
                       <a:r>
-                        <a:rPr lang="es-ES" sz="1000" dirty="0"/>
+                        <a:rPr lang="es-ES" sz="900" dirty="0"/>
                         <a:t>{{MODULO_5}}</a:t>
                       </a:r>
                     </a:p>
@@ -6164,7 +6053,7 @@
                         <a:defRPr/>
                       </a:pPr>
                       <a:r>
-                        <a:rPr lang="es-ES" sz="1000" dirty="0"/>
+                        <a:rPr lang="es-ES" sz="900" dirty="0"/>
                         <a:t>{{MODULO_6}}</a:t>
                       </a:r>
                     </a:p>
@@ -6260,7 +6149,7 @@
                         <a:defRPr/>
                       </a:pPr>
                       <a:r>
-                        <a:rPr lang="es-ES" sz="1000" dirty="0"/>
+                        <a:rPr lang="es-ES" sz="900" dirty="0"/>
                         <a:t>{{MODULO_7}}</a:t>
                       </a:r>
                     </a:p>
@@ -6356,7 +6245,7 @@
                         <a:defRPr/>
                       </a:pPr>
                       <a:r>
-                        <a:rPr lang="es-ES" sz="1000" dirty="0"/>
+                        <a:rPr lang="es-ES" sz="900" dirty="0"/>
                         <a:t>{{MODULO_8}}</a:t>
                       </a:r>
                     </a:p>
@@ -6668,10 +6557,82 @@
       </p:pic>
       <p:sp>
         <p:nvSpPr>
-          <p:cNvPr id="3" name="CuadroTexto 2">
+          <p:cNvPr id="9" name="Rectángulo 8">
             <a:extLst>
               <a:ext uri="{FF2B5EF4-FFF2-40B4-BE49-F238E27FC236}">
-                <a16:creationId xmlns:a16="http://schemas.microsoft.com/office/drawing/2014/main" id="{0D391E27-095D-5DB2-7A0B-3AF86A407618}"/>
+                <a16:creationId xmlns:a16="http://schemas.microsoft.com/office/drawing/2014/main" id="{C20AC980-C716-2F9A-06C1-9B86085426E8}"/>
+              </a:ext>
+            </a:extLst>
+          </p:cNvPr>
+          <p:cNvSpPr/>
+          <p:nvPr/>
+        </p:nvSpPr>
+        <p:spPr>
+          <a:xfrm>
+            <a:off x="4541929" y="8673847"/>
+            <a:ext cx="2130198" cy="382156"/>
+          </a:xfrm>
+          <a:prstGeom prst="rect">
+            <a:avLst/>
+          </a:prstGeom>
+        </p:spPr>
+        <p:txBody>
+          <a:bodyPr wrap="square">
+            <a:spAutoFit/>
+          </a:bodyPr>
+          <a:lstStyle/>
+          <a:p>
+            <a:pPr lvl="0" algn="ctr">
+              <a:spcBef>
+                <a:spcPts val="59"/>
+              </a:spcBef>
+            </a:pPr>
+            <a:r>
+              <a:rPr lang="es-PE" sz="900" dirty="0">
+                <a:solidFill>
+                  <a:prstClr val="black"/>
+                </a:solidFill>
+                <a:latin typeface="Times New Roman" panose="02020603050405020304" pitchFamily="18" charset="0"/>
+                <a:ea typeface="Cambria Math" panose="02040503050406030204" pitchFamily="18" charset="0"/>
+                <a:cs typeface="Times New Roman" panose="02020603050405020304" pitchFamily="18" charset="0"/>
+              </a:rPr>
+              <a:t>CÓDIGO ESTUDIANTE:</a:t>
+            </a:r>
+          </a:p>
+          <a:p>
+            <a:pPr lvl="0" algn="ctr">
+              <a:spcBef>
+                <a:spcPts val="59"/>
+              </a:spcBef>
+            </a:pPr>
+            <a:r>
+              <a:rPr lang="es-PE" sz="900" b="1">
+                <a:solidFill>
+                  <a:prstClr val="black"/>
+                </a:solidFill>
+                <a:latin typeface="Times New Roman" panose="02020603050405020304" pitchFamily="18" charset="0"/>
+                <a:ea typeface="Cambria Math" panose="02040503050406030204" pitchFamily="18" charset="0"/>
+                <a:cs typeface="Times New Roman" panose="02020603050405020304" pitchFamily="18" charset="0"/>
+              </a:rPr>
+              <a:t>{{CODE_STUDENT}}</a:t>
+            </a:r>
+            <a:endParaRPr lang="es-PE" sz="900" b="1" dirty="0">
+              <a:solidFill>
+                <a:prstClr val="black"/>
+              </a:solidFill>
+              <a:latin typeface="Times New Roman" panose="02020603050405020304" pitchFamily="18" charset="0"/>
+              <a:ea typeface="Cambria Math" panose="02040503050406030204" pitchFamily="18" charset="0"/>
+              <a:cs typeface="Times New Roman" panose="02020603050405020304" pitchFamily="18" charset="0"/>
+            </a:endParaRPr>
+          </a:p>
+        </p:txBody>
+      </p:sp>
+      <p:sp>
+        <p:nvSpPr>
+          <p:cNvPr id="8" name="CuadroTexto 7">
+            <a:extLst>
+              <a:ext uri="{FF2B5EF4-FFF2-40B4-BE49-F238E27FC236}">
+                <a16:creationId xmlns:a16="http://schemas.microsoft.com/office/drawing/2014/main" id="{583F116F-096E-F9FA-282C-D9CF0478B8EE}"/>
               </a:ext>
             </a:extLst>
           </p:cNvPr>
@@ -6680,7 +6641,7 @@
         </p:nvSpPr>
         <p:spPr>
           <a:xfrm>
-            <a:off x="3148307" y="8205520"/>
+            <a:off x="3223371" y="7944756"/>
             <a:ext cx="1397690" cy="369332"/>
           </a:xfrm>
           <a:prstGeom prst="rect">

--- a/app/templates/universidad_2qrs/plantilla_programa_de_especializacion.pptx
+++ b/app/templates/universidad_2qrs/plantilla_programa_de_especializacion.pptx
@@ -317,7 +317,7 @@
           <a:p>
             <a:fld id="{03C7FEFC-EB52-44D6-B3F1-2A7BB7FA4226}" type="datetimeFigureOut">
               <a:rPr lang="es-PE" smtClean="0"/>
-              <a:t>7/06/2026</a:t>
+              <a:t>12/06/2026</a:t>
             </a:fld>
             <a:endParaRPr lang="es-PE" dirty="0"/>
           </a:p>
@@ -482,7 +482,7 @@
           <a:p>
             <a:fld id="{64955E78-CBAA-441B-9163-D9CD5E983BDA}" type="datetimeFigureOut">
               <a:rPr lang="en-US" smtClean="0"/>
-              <a:t>6/7/2026</a:t>
+              <a:t>6/12/2026</a:t>
             </a:fld>
             <a:endParaRPr lang="en-US" dirty="0"/>
           </a:p>
@@ -881,7 +881,7 @@
           <a:p>
             <a:fld id="{5C4C4E00-4716-4B48-9D97-535E4F94A274}" type="datetimeFigureOut">
               <a:rPr lang="es-PE" smtClean="0"/>
-              <a:t>7/06/2026</a:t>
+              <a:t>12/06/2026</a:t>
             </a:fld>
             <a:endParaRPr lang="es-PE" dirty="0"/>
           </a:p>
@@ -1051,7 +1051,7 @@
           <a:p>
             <a:fld id="{5C4C4E00-4716-4B48-9D97-535E4F94A274}" type="datetimeFigureOut">
               <a:rPr lang="es-PE" smtClean="0"/>
-              <a:t>7/06/2026</a:t>
+              <a:t>12/06/2026</a:t>
             </a:fld>
             <a:endParaRPr lang="es-PE" dirty="0"/>
           </a:p>
@@ -1231,7 +1231,7 @@
           <a:p>
             <a:fld id="{5C4C4E00-4716-4B48-9D97-535E4F94A274}" type="datetimeFigureOut">
               <a:rPr lang="es-PE" smtClean="0"/>
-              <a:t>7/06/2026</a:t>
+              <a:t>12/06/2026</a:t>
             </a:fld>
             <a:endParaRPr lang="es-PE" dirty="0"/>
           </a:p>
@@ -1401,7 +1401,7 @@
           <a:p>
             <a:fld id="{5C4C4E00-4716-4B48-9D97-535E4F94A274}" type="datetimeFigureOut">
               <a:rPr lang="es-PE" smtClean="0"/>
-              <a:t>7/06/2026</a:t>
+              <a:t>12/06/2026</a:t>
             </a:fld>
             <a:endParaRPr lang="es-PE" dirty="0"/>
           </a:p>
@@ -1645,7 +1645,7 @@
           <a:p>
             <a:fld id="{5C4C4E00-4716-4B48-9D97-535E4F94A274}" type="datetimeFigureOut">
               <a:rPr lang="es-PE" smtClean="0"/>
-              <a:t>7/06/2026</a:t>
+              <a:t>12/06/2026</a:t>
             </a:fld>
             <a:endParaRPr lang="es-PE" dirty="0"/>
           </a:p>
@@ -1877,7 +1877,7 @@
           <a:p>
             <a:fld id="{5C4C4E00-4716-4B48-9D97-535E4F94A274}" type="datetimeFigureOut">
               <a:rPr lang="es-PE" smtClean="0"/>
-              <a:t>7/06/2026</a:t>
+              <a:t>12/06/2026</a:t>
             </a:fld>
             <a:endParaRPr lang="es-PE" dirty="0"/>
           </a:p>
@@ -2244,7 +2244,7 @@
           <a:p>
             <a:fld id="{5C4C4E00-4716-4B48-9D97-535E4F94A274}" type="datetimeFigureOut">
               <a:rPr lang="es-PE" smtClean="0"/>
-              <a:t>7/06/2026</a:t>
+              <a:t>12/06/2026</a:t>
             </a:fld>
             <a:endParaRPr lang="es-PE" dirty="0"/>
           </a:p>
@@ -2362,7 +2362,7 @@
           <a:p>
             <a:fld id="{5C4C4E00-4716-4B48-9D97-535E4F94A274}" type="datetimeFigureOut">
               <a:rPr lang="es-PE" smtClean="0"/>
-              <a:t>7/06/2026</a:t>
+              <a:t>12/06/2026</a:t>
             </a:fld>
             <a:endParaRPr lang="es-PE" dirty="0"/>
           </a:p>
@@ -2457,7 +2457,7 @@
           <a:p>
             <a:fld id="{5C4C4E00-4716-4B48-9D97-535E4F94A274}" type="datetimeFigureOut">
               <a:rPr lang="es-PE" smtClean="0"/>
-              <a:t>7/06/2026</a:t>
+              <a:t>12/06/2026</a:t>
             </a:fld>
             <a:endParaRPr lang="es-PE" dirty="0"/>
           </a:p>
@@ -2734,7 +2734,7 @@
           <a:p>
             <a:fld id="{5C4C4E00-4716-4B48-9D97-535E4F94A274}" type="datetimeFigureOut">
               <a:rPr lang="es-PE" smtClean="0"/>
-              <a:t>7/06/2026</a:t>
+              <a:t>12/06/2026</a:t>
             </a:fld>
             <a:endParaRPr lang="es-PE" dirty="0"/>
           </a:p>
@@ -2991,7 +2991,7 @@
           <a:p>
             <a:fld id="{5C4C4E00-4716-4B48-9D97-535E4F94A274}" type="datetimeFigureOut">
               <a:rPr lang="es-PE" smtClean="0"/>
-              <a:t>7/06/2026</a:t>
+              <a:t>12/06/2026</a:t>
             </a:fld>
             <a:endParaRPr lang="es-PE" dirty="0"/>
           </a:p>
@@ -3204,7 +3204,7 @@
           <a:p>
             <a:fld id="{5C4C4E00-4716-4B48-9D97-535E4F94A274}" type="datetimeFigureOut">
               <a:rPr lang="es-PE" smtClean="0"/>
-              <a:t>7/06/2026</a:t>
+              <a:t>12/06/2026</a:t>
             </a:fld>
             <a:endParaRPr lang="es-PE" dirty="0"/>
           </a:p>
@@ -4525,6 +4525,17 @@
               </a:spcBef>
             </a:pPr>
             <a:r>
+              <a:rPr lang="es-PE" sz="1400">
+                <a:solidFill>
+                  <a:prstClr val="black"/>
+                </a:solidFill>
+                <a:latin typeface="Times New Roman" panose="02020603050405020304" pitchFamily="18" charset="0"/>
+                <a:ea typeface="Cambria Math" panose="02040503050406030204" pitchFamily="18" charset="0"/>
+                <a:cs typeface="Times New Roman" panose="02020603050405020304" pitchFamily="18" charset="0"/>
+              </a:rPr>
+              <a:t>                                                                            {{CIUDAD}}, </a:t>
+            </a:r>
+            <a:r>
               <a:rPr lang="es-PE" sz="1400" dirty="0">
                 <a:solidFill>
                   <a:prstClr val="black"/>
@@ -4533,7 +4544,7 @@
                 <a:ea typeface="Cambria Math" panose="02040503050406030204" pitchFamily="18" charset="0"/>
                 <a:cs typeface="Times New Roman" panose="02020603050405020304" pitchFamily="18" charset="0"/>
               </a:rPr>
-              <a:t>                                                                            {{CIUDAD}}, {{FECHA_EMISION_LARGA}}</a:t>
+              <a:t>{{FECHA_EMISION_LARGA}}</a:t>
             </a:r>
             <a:endParaRPr lang="en-US" sz="1400" dirty="0">
               <a:solidFill>
